--- a/lessons/output/spiritual-gifts/spiritual-gifts-slides.pptx
+++ b/lessons/output/spiritual-gifts/spiritual-gifts-slides.pptx
@@ -14,6 +14,7 @@
     <p:sldId id="262" r:id="rId14"/>
     <p:sldId id="263" r:id="rId15"/>
     <p:sldId id="264" r:id="rId16"/>
+    <p:sldId id="265" r:id="rId17"/>
   </p:sldIdLst>
   <p:sldSz cx="12191695" cy="6858000" type="screen4x3"/>
   <p:notesSz cx="6858000" cy="9144000"/>
@@ -681,6 +682,76 @@
           <a:p>
             <a:r>
               <a:t>“A man may possess the best of all these gifts, and yet be deficient in what is essentially necessary to his salvation, for he may be without that love” — Adam Clarke, Commentary on the Bible, on 1 Corinthians 12:31</a:t>
+            </a:r>
+          </a:p>
+        </p:txBody>
+      </p:sp>
+      <p:sp>
+        <p:nvSpPr>
+          <p:cNvPr id="4" name="Slide Number Placeholder 3"/>
+          <p:cNvSpPr>
+            <a:spLocks noGrp="1"/>
+          </p:cNvSpPr>
+          <p:nvPr>
+            <p:ph type="sldNum" idx="5" sz="quarter"/>
+          </p:nvPr>
+        </p:nvSpPr>
+        <p:spPr/>
+      </p:sp>
+    </p:spTree>
+  </p:cSld>
+  <p:clrMapOvr>
+    <a:masterClrMapping/>
+  </p:clrMapOvr>
+</p:notes>
+</file>
+
+<file path=ppt/notesSlides/notesSlide4.xml><?xml version="1.0" encoding="utf-8"?>
+<p:notes xmlns:a="http://schemas.openxmlformats.org/drawingml/2006/main" xmlns:p="http://schemas.openxmlformats.org/presentationml/2006/main" xmlns:r="http://schemas.openxmlformats.org/officeDocument/2006/relationships">
+  <p:cSld>
+    <p:spTree>
+      <p:nvGrpSpPr>
+        <p:cNvPr id="1" name=""/>
+        <p:cNvGrpSpPr/>
+        <p:nvPr/>
+      </p:nvGrpSpPr>
+      <p:grpSpPr>
+        <a:xfrm>
+          <a:off x="0" y="0"/>
+          <a:ext cx="0" cy="0"/>
+          <a:chOff x="0" y="0"/>
+          <a:chExt cx="0" cy="0"/>
+        </a:xfrm>
+      </p:grpSpPr>
+      <p:sp>
+        <p:nvSpPr>
+          <p:cNvPr id="2" name="Slide Image Placeholder 1"/>
+          <p:cNvSpPr>
+            <a:spLocks noGrp="1"/>
+          </p:cNvSpPr>
+          <p:nvPr>
+            <p:ph type="sldImg" idx="2"/>
+          </p:nvPr>
+        </p:nvSpPr>
+        <p:spPr/>
+      </p:sp>
+      <p:sp>
+        <p:nvSpPr>
+          <p:cNvPr id="3" name="Notes Placeholder 2"/>
+          <p:cNvSpPr>
+            <a:spLocks noGrp="1"/>
+          </p:cNvSpPr>
+          <p:nvPr>
+            <p:ph type="body" idx="3" sz="quarter"/>
+          </p:nvPr>
+        </p:nvSpPr>
+        <p:spPr/>
+        <p:txBody>
+          <a:bodyPr/>
+          <a:lstStyle/>
+          <a:p>
+            <a:r>
+              <a:t>Christians agree that the Holy Spirit gives gifts to every believer for the good of the church; that the Spirit leads us to confess Jesus as Lord; that gifts must be used in love and in good order (1 Corinthians 14:40); that God hears and answers prayer for the sick; and that every claim to speak for God must be tested by Scripture. They differ over whether the more extraordinary gifts listed in verses 8-10 (prophecy, tongues, interpretation, gifts of healing and miracles) continue in the church today in the same way as in the apostles' time, and over whether there is a "baptism in the Holy Spirit" after conversion, marked by speaking in tongues. Here are the main views of the five traditions, each described as its own teachers would describe it. Within most traditions, individual churches and believers vary.</a:t>
             </a:r>
           </a:p>
         </p:txBody>
@@ -3851,6 +3922,189 @@
 </p:sld>
 </file>
 
+<file path=ppt/slides/slide10.xml><?xml version="1.0" encoding="utf-8"?>
+<p:sld xmlns:a="http://schemas.openxmlformats.org/drawingml/2006/main" xmlns:p="http://schemas.openxmlformats.org/presentationml/2006/main" xmlns:r="http://schemas.openxmlformats.org/officeDocument/2006/relationships">
+  <p:cSld>
+    <p:spTree>
+      <p:nvGrpSpPr>
+        <p:cNvPr id="1" name=""/>
+        <p:cNvGrpSpPr/>
+        <p:nvPr/>
+      </p:nvGrpSpPr>
+      <p:grpSpPr/>
+      <p:sp>
+        <p:nvSpPr>
+          <p:cNvPr id="2" name="Rectangle 1"/>
+          <p:cNvSpPr/>
+          <p:nvPr/>
+        </p:nvSpPr>
+        <p:spPr>
+          <a:xfrm>
+            <a:off x="0" y="0"/>
+            <a:ext cx="12191695" cy="109728"/>
+          </a:xfrm>
+          <a:prstGeom prst="rect">
+            <a:avLst/>
+          </a:prstGeom>
+          <a:solidFill>
+            <a:srgbClr val="2E5E8C"/>
+          </a:solidFill>
+          <a:ln>
+            <a:noFill/>
+          </a:ln>
+        </p:spPr>
+        <p:style>
+          <a:lnRef idx="1">
+            <a:schemeClr val="accent1"/>
+          </a:lnRef>
+          <a:fillRef idx="3">
+            <a:schemeClr val="accent1"/>
+          </a:fillRef>
+          <a:effectRef idx="2">
+            <a:schemeClr val="accent1"/>
+          </a:effectRef>
+          <a:fontRef idx="minor">
+            <a:schemeClr val="lt1"/>
+          </a:fontRef>
+        </p:style>
+        <p:txBody>
+          <a:bodyPr rtlCol="0" anchor="ctr"/>
+          <a:lstStyle/>
+          <a:p>
+            <a:pPr algn="ctr"/>
+          </a:p>
+        </p:txBody>
+      </p:sp>
+      <p:sp>
+        <p:nvSpPr>
+          <p:cNvPr id="3" name="TextBox 2"/>
+          <p:cNvSpPr txBox="1"/>
+          <p:nvPr/>
+        </p:nvSpPr>
+        <p:spPr>
+          <a:xfrm>
+            <a:off x="640080" y="411480"/>
+            <a:ext cx="10881360" cy="914400"/>
+          </a:xfrm>
+          <a:prstGeom prst="rect">
+            <a:avLst/>
+          </a:prstGeom>
+          <a:noFill/>
+        </p:spPr>
+        <p:txBody>
+          <a:bodyPr wrap="square">
+            <a:spAutoFit/>
+          </a:bodyPr>
+          <a:lstStyle/>
+          <a:p>
+            <a:pPr>
+              <a:spcAft>
+                <a:spcPts val="1000"/>
+              </a:spcAft>
+            </a:pPr>
+            <a:r>
+              <a:rPr sz="3200" b="1" i="0">
+                <a:solidFill>
+                  <a:srgbClr val="222B36"/>
+                </a:solidFill>
+              </a:rPr>
+              <a:t>Discuss (continued)</a:t>
+            </a:r>
+          </a:p>
+        </p:txBody>
+      </p:sp>
+      <p:sp>
+        <p:nvSpPr>
+          <p:cNvPr id="4" name="TextBox 3"/>
+          <p:cNvSpPr txBox="1"/>
+          <p:nvPr/>
+        </p:nvSpPr>
+        <p:spPr>
+          <a:xfrm>
+            <a:off x="640080" y="6263640"/>
+            <a:ext cx="10881360" cy="365760"/>
+          </a:xfrm>
+          <a:prstGeom prst="rect">
+            <a:avLst/>
+          </a:prstGeom>
+          <a:noFill/>
+        </p:spPr>
+        <p:txBody>
+          <a:bodyPr wrap="square">
+            <a:spAutoFit/>
+          </a:bodyPr>
+          <a:lstStyle/>
+          <a:p>
+            <a:pPr>
+              <a:spcAft>
+                <a:spcPts val="1000"/>
+              </a:spcAft>
+            </a:pPr>
+            <a:r>
+              <a:rPr sz="1200" b="0" i="0">
+                <a:solidFill>
+                  <a:srgbClr val="6B7280"/>
+                </a:solidFill>
+              </a:rPr>
+              <a:t>Gifts of the Spirit</a:t>
+            </a:r>
+          </a:p>
+        </p:txBody>
+      </p:sp>
+      <p:sp>
+        <p:nvSpPr>
+          <p:cNvPr id="5" name="TextBox 4"/>
+          <p:cNvSpPr txBox="1"/>
+          <p:nvPr/>
+        </p:nvSpPr>
+        <p:spPr>
+          <a:xfrm>
+            <a:off x="640080" y="1554480"/>
+            <a:ext cx="10881360" cy="4572000"/>
+          </a:xfrm>
+          <a:prstGeom prst="rect">
+            <a:avLst/>
+          </a:prstGeom>
+          <a:noFill/>
+        </p:spPr>
+        <p:txBody>
+          <a:bodyPr wrap="square">
+            <a:spAutoFit/>
+          </a:bodyPr>
+          <a:lstStyle/>
+          <a:p>
+            <a:pPr>
+              <a:spcAft>
+                <a:spcPts val="1800"/>
+              </a:spcAft>
+            </a:pPr>
+            <a:r>
+              <a:rPr sz="2800" b="1" i="0">
+                <a:solidFill>
+                  <a:srgbClr val="2E5E8C"/>
+                </a:solidFill>
+              </a:rPr>
+              <a:t>4.  </a:t>
+            </a:r>
+            <a:r>
+              <a:rPr sz="2800" b="0" i="0">
+                <a:solidFill>
+                  <a:srgbClr val="222B36"/>
+                </a:solidFill>
+              </a:rPr>
+              <a:t>What gifts has God given you, and how could you use one this week to serve others?</a:t>
+            </a:r>
+          </a:p>
+        </p:txBody>
+      </p:sp>
+    </p:spTree>
+  </p:cSld>
+  <p:clrMapOvr>
+    <a:masterClrMapping/>
+  </p:clrMapOvr>
+</p:sld>
+</file>
+
 <file path=ppt/slides/slide2.xml><?xml version="1.0" encoding="utf-8"?>
 <p:sld xmlns:a="http://schemas.openxmlformats.org/drawingml/2006/main" xmlns:p="http://schemas.openxmlformats.org/presentationml/2006/main" xmlns:r="http://schemas.openxmlformats.org/officeDocument/2006/relationships">
   <p:cSld>
@@ -5277,7 +5531,7 @@
                   <a:srgbClr val="222B36"/>
                 </a:solidFill>
               </a:rPr>
-              <a:t>Discuss</a:t>
+              <a:t>Where Christians differ</a:t>
             </a:r>
           </a:p>
         </p:txBody>
@@ -5328,8 +5582,8 @@
         </p:nvSpPr>
         <p:spPr>
           <a:xfrm>
-            <a:off x="640080" y="1554480"/>
-            <a:ext cx="10881360" cy="4572000"/>
+            <a:off x="640080" y="1417320"/>
+            <a:ext cx="10881360" cy="4754880"/>
           </a:xfrm>
           <a:prstGeom prst="rect">
             <a:avLst/>
@@ -5344,70 +5598,116 @@
           <a:p>
             <a:pPr>
               <a:spcAft>
-                <a:spcPts val="1800"/>
+                <a:spcPts val="1200"/>
               </a:spcAft>
             </a:pPr>
             <a:r>
-              <a:rPr sz="2800" b="1" i="0">
+              <a:rPr sz="2000" b="1" i="0">
                 <a:solidFill>
                   <a:srgbClr val="2E5E8C"/>
                 </a:solidFill>
               </a:rPr>
-              <a:t>1.  </a:t>
-            </a:r>
-            <a:r>
-              <a:rPr sz="2800" b="0" i="0">
+              <a:t>Baptist:  </a:t>
+            </a:r>
+            <a:r>
+              <a:rPr sz="2000" b="0" i="0">
                 <a:solidFill>
                   <a:srgbClr val="222B36"/>
                 </a:solidFill>
               </a:rPr>
-              <a:t>What do all Christians agree about spiritual gifts, according to this passage?</a:t>
+              <a:t>Historically, the sign gifts ended with the apostles; Baptist views today vary widely.</a:t>
             </a:r>
           </a:p>
           <a:p>
             <a:pPr>
               <a:spcAft>
-                <a:spcPts val="1800"/>
+                <a:spcPts val="1200"/>
               </a:spcAft>
             </a:pPr>
             <a:r>
-              <a:rPr sz="2800" b="1" i="0">
+              <a:rPr sz="2000" b="1" i="0">
                 <a:solidFill>
                   <a:srgbClr val="2E5E8C"/>
                 </a:solidFill>
               </a:rPr>
-              <a:t>2.  </a:t>
-            </a:r>
-            <a:r>
-              <a:rPr sz="2800" b="0" i="0">
+              <a:t>Methodist and Wesleyan:  </a:t>
+            </a:r>
+            <a:r>
+              <a:rPr sz="2000" b="0" i="0">
                 <a:solidFill>
                   <a:srgbClr val="222B36"/>
                 </a:solidFill>
               </a:rPr>
-              <a:t>Why do sincere Christians reading the same chapter reach different conclusions about tongues, prophecy and healing today?</a:t>
+              <a:t>Holiness and love come first; the extraordinary gifts are not ruled out.</a:t>
             </a:r>
           </a:p>
           <a:p>
             <a:pPr>
               <a:spcAft>
-                <a:spcPts val="1800"/>
+                <a:spcPts val="1200"/>
               </a:spcAft>
             </a:pPr>
             <a:r>
-              <a:rPr sz="2800" b="1" i="0">
+              <a:rPr sz="2000" b="1" i="0">
                 <a:solidFill>
                   <a:srgbClr val="2E5E8C"/>
                 </a:solidFill>
               </a:rPr>
-              <a:t>3.  </a:t>
-            </a:r>
-            <a:r>
-              <a:rPr sz="2800" b="0" i="0">
+              <a:t>Presbyterian and Reformed:  </a:t>
+            </a:r>
+            <a:r>
+              <a:rPr sz="2000" b="0" i="0">
                 <a:solidFill>
                   <a:srgbClr val="222B36"/>
                 </a:solidFill>
               </a:rPr>
-              <a:t>How can we hold our own convictions about the gifts while loving believers who see this differently?</a:t>
+              <a:t>Historically, the revealing and miraculous gifts ceased when Scripture was complete.</a:t>
+            </a:r>
+          </a:p>
+          <a:p>
+            <a:pPr>
+              <a:spcAft>
+                <a:spcPts val="1200"/>
+              </a:spcAft>
+            </a:pPr>
+            <a:r>
+              <a:rPr sz="2000" b="1" i="0">
+                <a:solidFill>
+                  <a:srgbClr val="2E5E8C"/>
+                </a:solidFill>
+              </a:rPr>
+              <a:t>Lutheran:  </a:t>
+            </a:r>
+            <a:r>
+              <a:rPr sz="2000" b="0" i="0">
+                <a:solidFill>
+                  <a:srgbClr val="222B36"/>
+                </a:solidFill>
+              </a:rPr>
+              <a:t>The Spirit works through Word and Sacrament; extraordinary gifts are possible but not expected.</a:t>
+            </a:r>
+          </a:p>
+          <a:p>
+            <a:pPr>
+              <a:spcAft>
+                <a:spcPts val="1200"/>
+              </a:spcAft>
+            </a:pPr>
+            <a:r>
+              <a:rPr sz="2000" b="1" i="0">
+                <a:solidFill>
+                  <a:srgbClr val="2E5E8C"/>
+                </a:solidFill>
+              </a:rPr>
+              <a:t>Pentecostal and Charismatic:  </a:t>
+            </a:r>
+            <a:r>
+              <a:rPr sz="2000" b="0" i="0">
+                <a:solidFill>
+                  <a:srgbClr val="222B36"/>
+                </a:solidFill>
+              </a:rPr>
+              <a:t>All the gifts continue today, with a baptism in the Spirit shown by speaking in tongues.</a:t>
             </a:r>
           </a:p>
         </p:txBody>
@@ -5506,7 +5806,7 @@
                   <a:srgbClr val="222B36"/>
                 </a:solidFill>
               </a:rPr>
-              <a:t>Discuss (continued)</a:t>
+              <a:t>Discuss</a:t>
             </a:r>
           </a:p>
         </p:txBody>
@@ -5582,7 +5882,7 @@
                   <a:srgbClr val="2E5E8C"/>
                 </a:solidFill>
               </a:rPr>
-              <a:t>4.  </a:t>
+              <a:t>1.  </a:t>
             </a:r>
             <a:r>
               <a:rPr sz="2800" b="0" i="0">
@@ -5590,7 +5890,53 @@
                   <a:srgbClr val="222B36"/>
                 </a:solidFill>
               </a:rPr>
-              <a:t>What gifts has God given you, and how could you use one this week to serve others?</a:t>
+              <a:t>What do all Christians agree about spiritual gifts, according to this passage?</a:t>
+            </a:r>
+          </a:p>
+          <a:p>
+            <a:pPr>
+              <a:spcAft>
+                <a:spcPts val="1800"/>
+              </a:spcAft>
+            </a:pPr>
+            <a:r>
+              <a:rPr sz="2800" b="1" i="0">
+                <a:solidFill>
+                  <a:srgbClr val="2E5E8C"/>
+                </a:solidFill>
+              </a:rPr>
+              <a:t>2.  </a:t>
+            </a:r>
+            <a:r>
+              <a:rPr sz="2800" b="0" i="0">
+                <a:solidFill>
+                  <a:srgbClr val="222B36"/>
+                </a:solidFill>
+              </a:rPr>
+              <a:t>Why do sincere Christians reading the same chapter reach different conclusions about tongues, prophecy and healing today?</a:t>
+            </a:r>
+          </a:p>
+          <a:p>
+            <a:pPr>
+              <a:spcAft>
+                <a:spcPts val="1800"/>
+              </a:spcAft>
+            </a:pPr>
+            <a:r>
+              <a:rPr sz="2800" b="1" i="0">
+                <a:solidFill>
+                  <a:srgbClr val="2E5E8C"/>
+                </a:solidFill>
+              </a:rPr>
+              <a:t>3.  </a:t>
+            </a:r>
+            <a:r>
+              <a:rPr sz="2800" b="0" i="0">
+                <a:solidFill>
+                  <a:srgbClr val="222B36"/>
+                </a:solidFill>
+              </a:rPr>
+              <a:t>How can we hold our own convictions about the gifts while loving believers who see this differently?</a:t>
             </a:r>
           </a:p>
         </p:txBody>
